--- a/carpentry/intake-142/PowerPoint/Day-06_2026-11-05_Week-2.pptx
+++ b/carpentry/intake-142/PowerPoint/Day-06_2026-11-05_Week-2.pptx
@@ -693,7 +693,7 @@
           <a:p/>
           <a:p>
             <a:r>
-              <a:t>Open the textbook to Chapter 4, pages 59–61, and the exercise book to 4A, page 26. A drawing may label one part in quarters and another in sixteenths. We need to compare those dimensions without guessing from the picture. Where might that matter in carpentry? A good answer is checking whether two cut pieces match, or deciding how much must be trimmed. Today our evidence will be equivalent fractions and the marks on a rule.</a:t>
+              <a:t>Open the textbook to Chapter 4, pages 91–94, and the exercise book to 4A, page 36. A drawing may label one part in quarters and another in sixteenths. We need to compare those dimensions without guessing from the picture. Where might that matter in carpentry? A good answer is checking whether two cut pieces match, or deciding how much must be trimmed. Today our evidence will be equivalent fractions and the marks on a rule.</a:t>
             </a:r>
           </a:p>
         </p:txBody>
@@ -997,7 +997,7 @@
           <a:p/>
           <a:p>
             <a:r>
-              <a:t>Look across Figure 4.7 on page 59. The halfway position lines up even though each strip is divided differently. Read those names aloud: one half, two quarters, four eighths, eight sixteenths. What stays constant? The endpoint and the total length. What changes? The number and size of the equal pieces. Trace one quarter and then its two eighths; that small comparison explains the whole pattern. This picture is our check against a mechanical rule: multiplying top and bottom together preserves the amount because every original piece is subdivided equally.</a:t>
+              <a:t>Look across Figure 4.7 on page 92. The halfway position lines up even though each strip is divided differently. Read those names aloud: one half, two quarters, four eighths, eight sixteenths. What stays constant? The endpoint and the total length. What changes? The number and size of the equal pieces. Trace one quarter and then its two eighths; that small comparison explains the whole pattern. This picture is our check against a mechanical rule: multiplying top and bottom together preserves the amount because every original piece is subdivided equally.</a:t>
             </a:r>
           </a:p>
         </p:txBody>
@@ -1073,7 +1073,7 @@
           <a:p/>
           <a:p>
             <a:r>
-              <a:t>On page 61, follow Example 4.5 from its fractions to the rule. The useful move is choosing a shared unit before deciding which value is larger. Identify the denominator used in the comparison, then explain why both original fractions can be written with it. If we have quarters and sixteenths, sixteenths work because each quarter contains four of them. Where should the larger fraction appear on the rule? Farther from zero. If the arithmetic says one value is larger but our mark lies to the left, we need to check the conversion or the mark.</a:t>
+              <a:t>On page 94, follow Example 4.5 from its fractions to the rule. The useful move is choosing a shared unit before deciding which value is larger. Identify the denominator used in the comparison, then explain why both original fractions can be written with it. If we have quarters and sixteenths, sixteenths work because each quarter contains four of them. Where should the larger fraction appear on the rule? Farther from zero. If the arithmetic says one value is larger but our mark lies to the left, we need to check the conversion or the mark.</a:t>
             </a:r>
           </a:p>
         </p:txBody>
@@ -2237,7 +2237,7 @@
           <a:p/>
           <a:p>
             <a:r>
-              <a:t>We now need to recognize the same length in two forms: a whole-number part plus a fraction, or one count of fractional pieces. Open the textbook to pages 61–63; page 34 supports calculator entry. Where would you expect to see a mixed number? A dimension such as two and three eighths inches is a good example. An improper fraction may appear during calculation. Both forms can describe the same measurement, so we must read and convert them accurately.</a:t>
+              <a:t>We now need to recognize the same length in two forms: a whole-number part plus a fraction, or one count of fractional pieces. Open the textbook to pages 94–96; page 54 supports calculator entry. Where would you expect to see a mixed number? A dimension such as two and three eighths inches is a good example. An improper fraction may appear during calculation. Both forms can describe the same measurement, so we must read and convert them accurately.</a:t>
             </a:r>
           </a:p>
         </p:txBody>
@@ -2541,7 +2541,7 @@
           <a:p/>
           <a:p>
             <a:r>
-              <a:t>Page 63 shows mixed and improper fraction displays and the conversion sequence for each calculator model. Find the model that matches yours before pressing keys. Enter the whole-number part and both fraction parts in the order shown, then read the displayed value aloud. Ask yourself: does this display show the whole part I intended and the correct numerator and denominator? The d/c conversion changes how the value is presented; it does not alter the value. If your display differs, check entry and model instructions rather than copying a key sequence for a different calculator.</a:t>
+              <a:t>Page 96 shows mixed and improper fraction displays and the conversion sequence for each calculator model. Find the model that matches yours before pressing keys. Enter the whole-number part and both fraction parts in the order shown, then read the displayed value aloud. Ask yourself: does this display show the whole part I intended and the correct numerator and denominator? The d/c conversion changes how the value is presented; it does not alter the value. If your display differs, check entry and model instructions rather than copying a key sequence for a different calculator.</a:t>
             </a:r>
           </a:p>
         </p:txBody>
@@ -2617,7 +2617,7 @@
           <a:p/>
           <a:p>
             <a:r>
-              <a:t>In Example 4.7 on page 62, follow the line that multiplies the whole number by the denominator. That multiplication counts all the fractional pieces contained in the wholes. The next addition includes the extra pieces already shown in the mixed number. Why is the whole number multiplied before the numerator is added? Because the two quantities must describe the same kind of piece before we combine them. The denominator stays unchanged throughout. Read the line as a count of pieces, then use the reverse division to confirm that the original whole-number part and remainder return.</a:t>
+              <a:t>In Example 4.7 on page 95, follow the line that multiplies the whole number by the denominator. That multiplication counts all the fractional pieces contained in the wholes. The next addition includes the extra pieces already shown in the mixed number. Why is the whole number multiplied before the numerator is added? Because the two quantities must describe the same kind of piece before we combine them. The denominator stays unchanged throughout. Read the line as a count of pieces, then use the reverse division to confirm that the original whole-number part and remainder return.</a:t>
             </a:r>
           </a:p>
         </p:txBody>
@@ -3079,7 +3079,7 @@
           <a:p/>
           <a:p>
             <a:r>
-              <a:t>Open the calculator in Numeracy Hub and select the model you are learning to use. Keep page 34 beside you for that model's fraction-key sequence. We will enter a value from 4A questions 10–12 exactly as written. Before pressing the conversion key, predict whether the result should remain between the same two whole numbers. Why is that prediction useful? It catches a missing whole part or a mistaken fraction entry even when the screen's notation is unfamiliar.</a:t>
+              <a:t>Open the calculator in Numeracy Hub and select the model you are learning to use. Keep page 54 beside you for that model's fraction-key sequence. We will enter a value from 4A questions 10–12 exactly as written. Before pressing the conversion key, predict whether the result should remain between the same two whole numbers. Why is that prediction useful? It catches a missing whole part or a mistaken fraction entry even when the screen's notation is unfamiliar.</a:t>
             </a:r>
           </a:p>
         </p:txBody>
@@ -5427,7 +5427,7 @@
                 </a:solidFill>
                 <a:latin typeface="Arial"/>
               </a:rPr>
-              <a:t>Textbook Chapter 4 pp.59–61</a:t>
+              <a:t>Textbook Chapter 4 pp.91–94</a:t>
             </a:r>
           </a:p>
         </p:txBody>
@@ -6185,7 +6185,7 @@
                 </a:solidFill>
                 <a:latin typeface="Arial"/>
               </a:rPr>
-              <a:t>Textbook Chapter 4 pp.59–61</a:t>
+              <a:t>Textbook Chapter 4 pp.91–94</a:t>
             </a:r>
           </a:p>
         </p:txBody>
@@ -6385,7 +6385,7 @@
                 </a:solidFill>
                 <a:latin typeface="Arial"/>
               </a:rPr>
-              <a:t>Resources: Exercise Book 4A Q6–11 (p.26)</a:t>
+              <a:t>Resources: Exercise Book 4A Q6–11 (p.36)</a:t>
             </a:r>
           </a:p>
         </p:txBody>
@@ -6999,7 +6999,7 @@
                 </a:solidFill>
                 <a:latin typeface="Arial"/>
               </a:rPr>
-              <a:t>Textbook Chapter 4 pp.59–61</a:t>
+              <a:t>Textbook Chapter 4 pp.91–94</a:t>
             </a:r>
           </a:p>
         </p:txBody>
@@ -7755,7 +7755,7 @@
                 </a:solidFill>
                 <a:latin typeface="Arial"/>
               </a:rPr>
-              <a:t>Textbook Chapter 4 pp.59–61</a:t>
+              <a:t>Textbook Chapter 4 pp.91–94</a:t>
             </a:r>
           </a:p>
         </p:txBody>
@@ -8489,7 +8489,7 @@
                 </a:solidFill>
                 <a:latin typeface="Arial"/>
               </a:rPr>
-              <a:t>Textbook Chapter 4 pp.59–61</a:t>
+              <a:t>Textbook Chapter 4 pp.91–94</a:t>
             </a:r>
           </a:p>
         </p:txBody>
@@ -8689,7 +8689,7 @@
                 </a:solidFill>
                 <a:latin typeface="Arial"/>
               </a:rPr>
-              <a:t>Resources: Exercise Book 4A Q6–11 (p.26)</a:t>
+              <a:t>Resources: Exercise Book 4A Q6–11 (p.36)</a:t>
             </a:r>
           </a:p>
         </p:txBody>
@@ -9303,7 +9303,7 @@
                 </a:solidFill>
                 <a:latin typeface="Arial"/>
               </a:rPr>
-              <a:t>Textbook Chapter 4 pp.59–61</a:t>
+              <a:t>Textbook Chapter 4 pp.91–94</a:t>
             </a:r>
           </a:p>
         </p:txBody>
@@ -10079,7 +10079,7 @@
                 </a:solidFill>
                 <a:latin typeface="Arial"/>
               </a:rPr>
-              <a:t>Textbook Chapter 4 pp.59–61</a:t>
+              <a:t>Textbook Chapter 4 pp.91–94</a:t>
             </a:r>
           </a:p>
         </p:txBody>
@@ -11038,7 +11038,7 @@
                 </a:solidFill>
                 <a:latin typeface="Arial"/>
               </a:rPr>
-              <a:t>Textbook Chapter 4 pp.59–61</a:t>
+              <a:t>Textbook Chapter 4 pp.91–94</a:t>
             </a:r>
           </a:p>
         </p:txBody>
@@ -11724,7 +11724,7 @@
                 </a:solidFill>
                 <a:latin typeface="Arial"/>
               </a:rPr>
-              <a:t>Textbook Chapter 4 pp.59–61</a:t>
+              <a:t>Textbook Chapter 4 pp.91–94</a:t>
             </a:r>
           </a:p>
         </p:txBody>
@@ -12410,7 +12410,7 @@
                 </a:solidFill>
                 <a:latin typeface="Arial"/>
               </a:rPr>
-              <a:t>Textbook Chapter 4 pp.59–61</a:t>
+              <a:t>Textbook Chapter 4 pp.91–94</a:t>
             </a:r>
           </a:p>
         </p:txBody>
@@ -12610,7 +12610,7 @@
                 </a:solidFill>
                 <a:latin typeface="Arial"/>
               </a:rPr>
-              <a:t>Resources: Exercise Book 4A Q6–11 (p.26)</a:t>
+              <a:t>Resources: Exercise Book 4A Q6–11 (p.36)</a:t>
             </a:r>
           </a:p>
         </p:txBody>
@@ -16576,7 +16576,7 @@
                 </a:solidFill>
                 <a:latin typeface="Arial"/>
               </a:rPr>
-              <a:t>Textbook Chapter 4 pp.59–61</a:t>
+              <a:t>Textbook Chapter 4 pp.91–94</a:t>
             </a:r>
           </a:p>
         </p:txBody>
@@ -17262,7 +17262,7 @@
                 </a:solidFill>
                 <a:latin typeface="Arial"/>
               </a:rPr>
-              <a:t>Textbook Chapter 4 pp.59–61</a:t>
+              <a:t>Textbook Chapter 4 pp.91–94</a:t>
             </a:r>
           </a:p>
         </p:txBody>
@@ -17948,7 +17948,7 @@
                 </a:solidFill>
                 <a:latin typeface="Arial"/>
               </a:rPr>
-              <a:t>Textbook Chapter 4 pp.59–61</a:t>
+              <a:t>Textbook Chapter 4 pp.91–94</a:t>
             </a:r>
           </a:p>
         </p:txBody>
@@ -18148,7 +18148,7 @@
                 </a:solidFill>
                 <a:latin typeface="Arial"/>
               </a:rPr>
-              <a:t>Resources: Exercise Book 4A Q6–11 (p.26)</a:t>
+              <a:t>Resources: Exercise Book 4A Q6–11 (p.36)</a:t>
             </a:r>
           </a:p>
         </p:txBody>
@@ -19427,7 +19427,7 @@
                 </a:solidFill>
                 <a:latin typeface="Arial"/>
               </a:rPr>
-              <a:t>Textbook Chapter 4 pp.61–63; Chapter 2 p.34</a:t>
+              <a:t>Textbook Chapter 4 pp.94–96; Chapter 2 p.54</a:t>
             </a:r>
           </a:p>
         </p:txBody>
@@ -19627,7 +19627,7 @@
                 </a:solidFill>
                 <a:latin typeface="Arial"/>
               </a:rPr>
-              <a:t>Textbook Chapter 4 pp.61–63; Chapter 2 p.34</a:t>
+              <a:t>Textbook Chapter 4 pp.94–96; Chapter 2 p.54</a:t>
             </a:r>
           </a:p>
         </p:txBody>
@@ -19675,7 +19675,7 @@
                 </a:solidFill>
                 <a:latin typeface="Arial"/>
               </a:rPr>
-              <a:t>Exercise Book 4A Q10–13 (p.26); 2A Q9 (p.14)</a:t>
+              <a:t>Exercise Book 4A Q10–13 (p.36); 2A Q9 (p.18)</a:t>
             </a:r>
           </a:p>
         </p:txBody>
@@ -20337,7 +20337,7 @@
                 </a:solidFill>
                 <a:latin typeface="Arial"/>
               </a:rPr>
-              <a:t>Textbook Chapter 4 pp.61–63; Chapter 2 p.34</a:t>
+              <a:t>Textbook Chapter 4 pp.94–96; Chapter 2 p.54</a:t>
             </a:r>
           </a:p>
         </p:txBody>
@@ -20537,7 +20537,7 @@
                 </a:solidFill>
                 <a:latin typeface="Arial"/>
               </a:rPr>
-              <a:t>Resources: Exercise Book 4A Q10–13 (p.26); 2A Q9 (p.14)</a:t>
+              <a:t>Resources: Exercise Book 4A Q10–13 (p.36); 2A Q9 (p.18)</a:t>
             </a:r>
           </a:p>
         </p:txBody>
@@ -21286,7 +21286,7 @@
                 </a:solidFill>
                 <a:latin typeface="Arial"/>
               </a:rPr>
-              <a:t>Textbook Chapter 4 pp.61–63; Chapter 2 p.34</a:t>
+              <a:t>Textbook Chapter 4 pp.94–96; Chapter 2 p.54</a:t>
             </a:r>
           </a:p>
         </p:txBody>
@@ -22531,7 +22531,7 @@
                 </a:solidFill>
                 <a:latin typeface="Arial"/>
               </a:rPr>
-              <a:t>Textbook Chapter 4 pp.61–63; Chapter 2 p.34</a:t>
+              <a:t>Textbook Chapter 4 pp.94–96; Chapter 2 p.54</a:t>
             </a:r>
           </a:p>
         </p:txBody>
@@ -24349,7 +24349,7 @@
                 </a:solidFill>
                 <a:latin typeface="Arial"/>
               </a:rPr>
-              <a:t>Textbook  |  page 63</a:t>
+              <a:t>Textbook  |  page 96</a:t>
             </a:r>
           </a:p>
         </p:txBody>
@@ -24397,7 +24397,7 @@
                 </a:solidFill>
                 <a:latin typeface="Arial"/>
               </a:rPr>
-              <a:t>Textbook Chapter 4 pp.61–63; Chapter 2 p.34</a:t>
+              <a:t>Textbook Chapter 4 pp.94–96; Chapter 2 p.54</a:t>
             </a:r>
           </a:p>
         </p:txBody>
@@ -24469,7 +24469,7 @@
                 </a:solidFill>
                 <a:latin typeface="Arial"/>
               </a:rPr>
-              <a:t>Textbook p.63 · Enter a mixed number and change it to an improper fraction.</a:t>
+              <a:t>Textbook p.96 · Enter a mixed number and change it to an improper fraction.</a:t>
             </a:r>
           </a:p>
         </p:txBody>
@@ -25038,7 +25038,7 @@
                 </a:solidFill>
                 <a:latin typeface="Arial"/>
               </a:rPr>
-              <a:t>Textbook Chapter 4 pp.59–61</a:t>
+              <a:t>Textbook Chapter 4 pp.91–94</a:t>
             </a:r>
           </a:p>
         </p:txBody>
@@ -25238,7 +25238,7 @@
                 </a:solidFill>
                 <a:latin typeface="Arial"/>
               </a:rPr>
-              <a:t>Textbook Chapter 4 pp.59–61</a:t>
+              <a:t>Textbook Chapter 4 pp.91–94</a:t>
             </a:r>
           </a:p>
         </p:txBody>
@@ -25286,7 +25286,7 @@
                 </a:solidFill>
                 <a:latin typeface="Arial"/>
               </a:rPr>
-              <a:t>Exercise Book 4A Q6–11 (p.26)</a:t>
+              <a:t>Exercise Book 4A Q6–11 (p.36)</a:t>
             </a:r>
           </a:p>
         </p:txBody>
@@ -25900,7 +25900,7 @@
                 </a:solidFill>
                 <a:latin typeface="Arial"/>
               </a:rPr>
-              <a:t>Textbook  |  page 62</a:t>
+              <a:t>Textbook  |  page 95</a:t>
             </a:r>
           </a:p>
         </p:txBody>
@@ -25948,7 +25948,7 @@
                 </a:solidFill>
                 <a:latin typeface="Arial"/>
               </a:rPr>
-              <a:t>Textbook Chapter 4 pp.61–63; Chapter 2 p.34</a:t>
+              <a:t>Textbook Chapter 4 pp.94–96; Chapter 2 p.54</a:t>
             </a:r>
           </a:p>
         </p:txBody>
@@ -26020,7 +26020,7 @@
                 </a:solidFill>
                 <a:latin typeface="Arial"/>
               </a:rPr>
-              <a:t>Textbook p.62 · Example 4.7: whole × denominator + numerator.</a:t>
+              <a:t>Textbook p.95 · Example 4.7: whole × denominator + numerator.</a:t>
             </a:r>
           </a:p>
         </p:txBody>
@@ -26634,7 +26634,7 @@
                 </a:solidFill>
                 <a:latin typeface="Arial"/>
               </a:rPr>
-              <a:t>Textbook Chapter 4 pp.61–63; Chapter 2 p.34</a:t>
+              <a:t>Textbook Chapter 4 pp.94–96; Chapter 2 p.54</a:t>
             </a:r>
           </a:p>
         </p:txBody>
@@ -27392,7 +27392,7 @@
                 </a:solidFill>
                 <a:latin typeface="Arial"/>
               </a:rPr>
-              <a:t>Textbook Chapter 4 pp.61–63; Chapter 2 p.34</a:t>
+              <a:t>Textbook Chapter 4 pp.94–96; Chapter 2 p.54</a:t>
             </a:r>
           </a:p>
         </p:txBody>
@@ -27592,7 +27592,7 @@
                 </a:solidFill>
                 <a:latin typeface="Arial"/>
               </a:rPr>
-              <a:t>Resources: Exercise Book 4A Q10–13 (p.26); 2A Q9 (p.14)</a:t>
+              <a:t>Resources: Exercise Book 4A Q10–13 (p.36); 2A Q9 (p.18)</a:t>
             </a:r>
           </a:p>
         </p:txBody>
@@ -28206,7 +28206,7 @@
                 </a:solidFill>
                 <a:latin typeface="Arial"/>
               </a:rPr>
-              <a:t>Textbook Chapter 4 pp.61–63; Chapter 2 p.34</a:t>
+              <a:t>Textbook Chapter 4 pp.94–96; Chapter 2 p.54</a:t>
             </a:r>
           </a:p>
         </p:txBody>
@@ -28937,7 +28937,7 @@
                 </a:solidFill>
                 <a:latin typeface="Arial"/>
               </a:rPr>
-              <a:t>Textbook Chapter 4 pp.61–63; Chapter 2 p.34</a:t>
+              <a:t>Textbook Chapter 4 pp.94–96; Chapter 2 p.54</a:t>
             </a:r>
           </a:p>
         </p:txBody>
@@ -29671,7 +29671,7 @@
                 </a:solidFill>
                 <a:latin typeface="Arial"/>
               </a:rPr>
-              <a:t>Textbook Chapter 4 pp.61–63; Chapter 2 p.34</a:t>
+              <a:t>Textbook Chapter 4 pp.94–96; Chapter 2 p.54</a:t>
             </a:r>
           </a:p>
         </p:txBody>
@@ -29871,7 +29871,7 @@
                 </a:solidFill>
                 <a:latin typeface="Arial"/>
               </a:rPr>
-              <a:t>Resources: Exercise Book 4A Q10–13 (p.26); 2A Q9 (p.14)</a:t>
+              <a:t>Resources: Exercise Book 4A Q10–13 (p.36); 2A Q9 (p.18)</a:t>
             </a:r>
           </a:p>
         </p:txBody>
@@ -30485,7 +30485,7 @@
                 </a:solidFill>
                 <a:latin typeface="Arial"/>
               </a:rPr>
-              <a:t>Textbook Chapter 4 pp.61–63; Chapter 2 p.34</a:t>
+              <a:t>Textbook Chapter 4 pp.94–96; Chapter 2 p.54</a:t>
             </a:r>
           </a:p>
         </p:txBody>
@@ -31261,7 +31261,7 @@
                 </a:solidFill>
                 <a:latin typeface="Arial"/>
               </a:rPr>
-              <a:t>Textbook Chapter 4 pp.61–63; Chapter 2 p.34</a:t>
+              <a:t>Textbook Chapter 4 pp.94–96; Chapter 2 p.54</a:t>
             </a:r>
           </a:p>
         </p:txBody>
@@ -31376,7 +31376,7 @@
                 </a:solidFill>
                 <a:latin typeface="Arial"/>
               </a:rPr>
-              <a:t>Supported: Select the learner’s Numeracy Hub calculator model and follow Textbook p.34.</a:t>
+              <a:t>Supported: Select the learner’s Numeracy Hub calculator model and follow Textbook p.54.</a:t>
             </a:r>
           </a:p>
         </p:txBody>
@@ -32220,7 +32220,7 @@
                 </a:solidFill>
                 <a:latin typeface="Arial"/>
               </a:rPr>
-              <a:t>Textbook Chapter 4 pp.61–63; Chapter 2 p.34</a:t>
+              <a:t>Textbook Chapter 4 pp.94–96; Chapter 2 p.54</a:t>
             </a:r>
           </a:p>
         </p:txBody>
@@ -32906,7 +32906,7 @@
                 </a:solidFill>
                 <a:latin typeface="Arial"/>
               </a:rPr>
-              <a:t>Textbook Chapter 4 pp.61–63; Chapter 2 p.34</a:t>
+              <a:t>Textbook Chapter 4 pp.94–96; Chapter 2 p.54</a:t>
             </a:r>
           </a:p>
         </p:txBody>
@@ -33592,7 +33592,7 @@
                 </a:solidFill>
                 <a:latin typeface="Arial"/>
               </a:rPr>
-              <a:t>Textbook Chapter 4 pp.59–61</a:t>
+              <a:t>Textbook Chapter 4 pp.91–94</a:t>
             </a:r>
           </a:p>
         </p:txBody>
@@ -33792,7 +33792,7 @@
                 </a:solidFill>
                 <a:latin typeface="Arial"/>
               </a:rPr>
-              <a:t>Resources: Exercise Book 4A Q6–11 (p.26)</a:t>
+              <a:t>Resources: Exercise Book 4A Q6–11 (p.36)</a:t>
             </a:r>
           </a:p>
         </p:txBody>
@@ -34406,7 +34406,7 @@
                 </a:solidFill>
                 <a:latin typeface="Arial"/>
               </a:rPr>
-              <a:t>Textbook Chapter 4 pp.61–63; Chapter 2 p.34</a:t>
+              <a:t>Textbook Chapter 4 pp.94–96; Chapter 2 p.54</a:t>
             </a:r>
           </a:p>
         </p:txBody>
@@ -34606,7 +34606,7 @@
                 </a:solidFill>
                 <a:latin typeface="Arial"/>
               </a:rPr>
-              <a:t>Resources: Exercise Book 4A Q10–13 (p.26); 2A Q9 (p.14)</a:t>
+              <a:t>Resources: Exercise Book 4A Q10–13 (p.36); 2A Q9 (p.18)</a:t>
             </a:r>
           </a:p>
         </p:txBody>
@@ -35220,7 +35220,7 @@
                 </a:solidFill>
                 <a:latin typeface="Arial"/>
               </a:rPr>
-              <a:t>Textbook Chapter 4 pp.61–63; Chapter 2 p.34</a:t>
+              <a:t>Textbook Chapter 4 pp.94–96; Chapter 2 p.54</a:t>
             </a:r>
           </a:p>
         </p:txBody>
@@ -35906,7 +35906,7 @@
                 </a:solidFill>
                 <a:latin typeface="Arial"/>
               </a:rPr>
-              <a:t>Textbook Chapter 4 pp.61–63; Chapter 2 p.34</a:t>
+              <a:t>Textbook Chapter 4 pp.94–96; Chapter 2 p.54</a:t>
             </a:r>
           </a:p>
         </p:txBody>
@@ -36592,7 +36592,7 @@
                 </a:solidFill>
                 <a:latin typeface="Arial"/>
               </a:rPr>
-              <a:t>Textbook Chapter 4 pp.61–63; Chapter 2 p.34</a:t>
+              <a:t>Textbook Chapter 4 pp.94–96; Chapter 2 p.54</a:t>
             </a:r>
           </a:p>
         </p:txBody>
@@ -36792,7 +36792,7 @@
                 </a:solidFill>
                 <a:latin typeface="Arial"/>
               </a:rPr>
-              <a:t>Resources: Exercise Book 4A Q10–13 (p.26); 2A Q9 (p.14)</a:t>
+              <a:t>Resources: Exercise Book 4A Q10–13 (p.36); 2A Q9 (p.18)</a:t>
             </a:r>
           </a:p>
         </p:txBody>
@@ -37541,7 +37541,7 @@
                 </a:solidFill>
                 <a:latin typeface="Arial"/>
               </a:rPr>
-              <a:t>Textbook Chapter 4 pp.59–61</a:t>
+              <a:t>Textbook Chapter 4 pp.91–94</a:t>
             </a:r>
           </a:p>
         </p:txBody>
@@ -38786,7 +38786,7 @@
                 </a:solidFill>
                 <a:latin typeface="Arial"/>
               </a:rPr>
-              <a:t>Textbook Chapter 4 pp.59–61</a:t>
+              <a:t>Textbook Chapter 4 pp.91–94</a:t>
             </a:r>
           </a:p>
         </p:txBody>
@@ -40621,7 +40621,7 @@
                 </a:solidFill>
                 <a:latin typeface="Arial"/>
               </a:rPr>
-              <a:t>Textbook  |  page 59</a:t>
+              <a:t>Textbook  |  page 92</a:t>
             </a:r>
           </a:p>
         </p:txBody>
@@ -40669,7 +40669,7 @@
                 </a:solidFill>
                 <a:latin typeface="Arial"/>
               </a:rPr>
-              <a:t>Textbook Chapter 4 pp.59–61</a:t>
+              <a:t>Textbook Chapter 4 pp.91–94</a:t>
             </a:r>
           </a:p>
         </p:txBody>
@@ -40741,7 +40741,7 @@
                 </a:solidFill>
                 <a:latin typeface="Arial"/>
               </a:rPr>
-              <a:t>Textbook p.59 · Figure 4.7: equivalent fractions mark the same length.</a:t>
+              <a:t>Textbook p.92 · Figure 4.7: equivalent fractions mark the same length.</a:t>
             </a:r>
           </a:p>
         </p:txBody>
@@ -41307,7 +41307,7 @@
                 </a:solidFill>
                 <a:latin typeface="Arial"/>
               </a:rPr>
-              <a:t>Textbook  |  page 61</a:t>
+              <a:t>Textbook  |  page 94</a:t>
             </a:r>
           </a:p>
         </p:txBody>
@@ -41355,7 +41355,7 @@
                 </a:solidFill>
                 <a:latin typeface="Arial"/>
               </a:rPr>
-              <a:t>Textbook Chapter 4 pp.59–61</a:t>
+              <a:t>Textbook Chapter 4 pp.91–94</a:t>
             </a:r>
           </a:p>
         </p:txBody>
@@ -41427,7 +41427,7 @@
                 </a:solidFill>
                 <a:latin typeface="Arial"/>
               </a:rPr>
-              <a:t>Textbook p.61 · Example 4.5: compare common denominators and confirm on the rule.</a:t>
+              <a:t>Textbook p.94 · Example 4.5: compare common denominators and confirm on the rule.</a:t>
             </a:r>
           </a:p>
         </p:txBody>

--- a/carpentry/intake-142/PowerPoint/Day-06_2026-11-05_Week-2.pptx
+++ b/carpentry/intake-142/PowerPoint/Day-06_2026-11-05_Week-2.pptx
@@ -18421,6 +18421,104 @@
           </a:p>
         </p:txBody>
       </p:sp>
+      <p:sp>
+        <p:nvSpPr>
+          <p:cNvPr id="22" name="Play quiz W02-L07"/>
+          <p:cNvSpPr txBox="1"/>
+          <p:nvPr/>
+        </p:nvSpPr>
+        <p:spPr>
+          <a:xfrm>
+            <a:off x="6355080" y="6606540"/>
+            <a:ext cx="822960" cy="210312"/>
+          </a:xfrm>
+          <a:prstGeom prst="rect">
+            <a:avLst/>
+          </a:prstGeom>
+          <a:noFill/>
+        </p:spPr>
+        <p:txBody>
+          <a:bodyPr wrap="square" lIns="0" rIns="0" tIns="0" bIns="0" anchor="t">
+            <a:normAutofit fontScale="100000" lnSpcReduction="0"/>
+          </a:bodyPr>
+          <a:lstStyle/>
+          <a:p>
+            <a:pPr>
+              <a:spcBef>
+                <a:spcPts val="0"/>
+              </a:spcBef>
+              <a:spcAft>
+                <a:spcPts val="0"/>
+              </a:spcAft>
+              <a:defRPr sz="1000" b="0">
+                <a:solidFill>
+                  <a:srgbClr val="D0002B"/>
+                </a:solidFill>
+                <a:latin typeface="Arial"/>
+              </a:defRPr>
+            </a:pPr>
+            <a:r>
+              <a:rPr sz="1000">
+                <a:solidFill>
+                  <a:srgbClr val="F7F8FC"/>
+                </a:solidFill>
+                <a:latin typeface="Arial"/>
+                <a:hlinkClick r:id="rId8"/>
+              </a:rPr>
+              <a:t>Play quiz</a:t>
+            </a:r>
+          </a:p>
+        </p:txBody>
+      </p:sp>
+      <p:sp>
+        <p:nvSpPr>
+          <p:cNvPr id="23" name="Quiz PDF W02-L07"/>
+          <p:cNvSpPr txBox="1"/>
+          <p:nvPr/>
+        </p:nvSpPr>
+        <p:spPr>
+          <a:xfrm>
+            <a:off x="7296912" y="6606540"/>
+            <a:ext cx="1005840" cy="210312"/>
+          </a:xfrm>
+          <a:prstGeom prst="rect">
+            <a:avLst/>
+          </a:prstGeom>
+          <a:noFill/>
+        </p:spPr>
+        <p:txBody>
+          <a:bodyPr wrap="square" lIns="0" rIns="0" tIns="0" bIns="0" anchor="t">
+            <a:normAutofit fontScale="100000" lnSpcReduction="0"/>
+          </a:bodyPr>
+          <a:lstStyle/>
+          <a:p>
+            <a:pPr>
+              <a:spcBef>
+                <a:spcPts val="0"/>
+              </a:spcBef>
+              <a:spcAft>
+                <a:spcPts val="0"/>
+              </a:spcAft>
+              <a:defRPr sz="1000" b="0">
+                <a:solidFill>
+                  <a:srgbClr val="D0002B"/>
+                </a:solidFill>
+                <a:latin typeface="Arial"/>
+              </a:defRPr>
+            </a:pPr>
+            <a:r>
+              <a:rPr sz="1000">
+                <a:solidFill>
+                  <a:srgbClr val="F7F8FC"/>
+                </a:solidFill>
+                <a:latin typeface="Arial"/>
+                <a:hlinkClick r:id="rId9"/>
+              </a:rPr>
+              <a:t>Quiz PDF</a:t>
+            </a:r>
+          </a:p>
+        </p:txBody>
+      </p:sp>
     </p:spTree>
   </p:cSld>
   <p:clrMapOvr>
@@ -37061,6 +37159,104 @@
                 <a:latin typeface="Arial"/>
               </a:rPr>
               <a:t>Day 06  •  2026-11-05  •  43</a:t>
+            </a:r>
+          </a:p>
+        </p:txBody>
+      </p:sp>
+      <p:sp>
+        <p:nvSpPr>
+          <p:cNvPr id="22" name="Play quiz W02-L08"/>
+          <p:cNvSpPr txBox="1"/>
+          <p:nvPr/>
+        </p:nvSpPr>
+        <p:spPr>
+          <a:xfrm>
+            <a:off x="6355080" y="6606540"/>
+            <a:ext cx="822960" cy="210312"/>
+          </a:xfrm>
+          <a:prstGeom prst="rect">
+            <a:avLst/>
+          </a:prstGeom>
+          <a:noFill/>
+        </p:spPr>
+        <p:txBody>
+          <a:bodyPr wrap="square" lIns="0" rIns="0" tIns="0" bIns="0" anchor="t">
+            <a:normAutofit fontScale="100000" lnSpcReduction="0"/>
+          </a:bodyPr>
+          <a:lstStyle/>
+          <a:p>
+            <a:pPr>
+              <a:spcBef>
+                <a:spcPts val="0"/>
+              </a:spcBef>
+              <a:spcAft>
+                <a:spcPts val="0"/>
+              </a:spcAft>
+              <a:defRPr sz="1000" b="0">
+                <a:solidFill>
+                  <a:srgbClr val="D0002B"/>
+                </a:solidFill>
+                <a:latin typeface="Arial"/>
+              </a:defRPr>
+            </a:pPr>
+            <a:r>
+              <a:rPr sz="1000">
+                <a:solidFill>
+                  <a:srgbClr val="F7F8FC"/>
+                </a:solidFill>
+                <a:latin typeface="Arial"/>
+                <a:hlinkClick r:id="rId8"/>
+              </a:rPr>
+              <a:t>Play quiz</a:t>
+            </a:r>
+          </a:p>
+        </p:txBody>
+      </p:sp>
+      <p:sp>
+        <p:nvSpPr>
+          <p:cNvPr id="23" name="Quiz PDF W02-L08"/>
+          <p:cNvSpPr txBox="1"/>
+          <p:nvPr/>
+        </p:nvSpPr>
+        <p:spPr>
+          <a:xfrm>
+            <a:off x="7296912" y="6606540"/>
+            <a:ext cx="1005840" cy="210312"/>
+          </a:xfrm>
+          <a:prstGeom prst="rect">
+            <a:avLst/>
+          </a:prstGeom>
+          <a:noFill/>
+        </p:spPr>
+        <p:txBody>
+          <a:bodyPr wrap="square" lIns="0" rIns="0" tIns="0" bIns="0" anchor="t">
+            <a:normAutofit fontScale="100000" lnSpcReduction="0"/>
+          </a:bodyPr>
+          <a:lstStyle/>
+          <a:p>
+            <a:pPr>
+              <a:spcBef>
+                <a:spcPts val="0"/>
+              </a:spcBef>
+              <a:spcAft>
+                <a:spcPts val="0"/>
+              </a:spcAft>
+              <a:defRPr sz="1000" b="0">
+                <a:solidFill>
+                  <a:srgbClr val="D0002B"/>
+                </a:solidFill>
+                <a:latin typeface="Arial"/>
+              </a:defRPr>
+            </a:pPr>
+            <a:r>
+              <a:rPr sz="1000">
+                <a:solidFill>
+                  <a:srgbClr val="F7F8FC"/>
+                </a:solidFill>
+                <a:latin typeface="Arial"/>
+                <a:hlinkClick r:id="rId9"/>
+              </a:rPr>
+              <a:t>Quiz PDF</a:t>
             </a:r>
           </a:p>
         </p:txBody>
